--- a/CEP Project1.pptx
+++ b/CEP Project1.pptx
@@ -117,7 +117,7 @@
 <file path=ppt/revisionInfo.xml><?xml version="1.0" encoding="utf-8"?>
 <p1510:revInfo xmlns:a="http://schemas.openxmlformats.org/drawingml/2006/main" xmlns:r="http://schemas.openxmlformats.org/officeDocument/2006/relationships" xmlns:p1510="http://schemas.microsoft.com/office/powerpoint/2015/10/main">
   <p1510:revLst>
-    <p1510:client id="{FCD88B4F-AF11-E7C5-86CE-E53BD8F3758A}" v="191" dt="2026-10-19T23:15:13.896"/>
+    <p1510:client id="{FCD88B4F-AF11-E7C5-86CE-E53BD8F3758A}" v="329" dt="2026-10-19T23:37:57.190"/>
   </p1510:revLst>
 </p1510:revInfo>
 </file>
@@ -10487,31 +10487,66 @@
         </p:nvSpPr>
         <p:spPr/>
         <p:txBody>
-          <a:bodyPr/>
+          <a:bodyPr vert="horz" lIns="91440" tIns="45720" rIns="91440" bIns="45720" rtlCol="0" anchor="t">
+            <a:normAutofit/>
+          </a:bodyPr>
           <a:lstStyle/>
           <a:p>
-            <a:endParaRPr lang="zh-CN" altLang="en-US"/>
-          </a:p>
-        </p:txBody>
-      </p:sp>
-      <p:sp>
-        <p:nvSpPr>
-          <p:cNvPr id="4" name="图片占位符 3">
-            <a:extLst>
-              <a:ext uri="{FF2B5EF4-FFF2-40B4-BE49-F238E27FC236}">
-                <a16:creationId xmlns:a16="http://schemas.microsoft.com/office/drawing/2014/main" id="{172DF2B3-732C-4598-4C53-1C229CAF7B38}"/>
-              </a:ext>
-            </a:extLst>
-          </p:cNvPr>
-          <p:cNvSpPr>
-            <a:spLocks noGrp="1" noChangeAspect="1"/>
-          </p:cNvSpPr>
+            <a:r>
+              <a:rPr lang="zh-CN" altLang="en-US" sz="2000" dirty="0"/>
+              <a:t>This was very popluar recently when Quince uploaded his video about Steve in Elden Ring. Even tho he didnt really mentioned how he exacly mashed two game, but using claude ai to merge games is popluar recently, and due to all </a:t>
+            </a:r>
+            <a:r>
+              <a:rPr lang="zh-CN" altLang="en-US" sz="2000"/>
+              <a:t>of stuff he added to Elden Ring, we assumed he used claude to help his creation.</a:t>
+            </a:r>
+          </a:p>
+        </p:txBody>
+      </p:sp>
+      <p:pic>
+        <p:nvPicPr>
+          <p:cNvPr id="8" name="图片占位符 7">
+            <a:extLst>
+              <a:ext uri="{FF2B5EF4-FFF2-40B4-BE49-F238E27FC236}">
+                <a16:creationId xmlns:a16="http://schemas.microsoft.com/office/drawing/2014/main" id="{41EDB882-1862-86AF-0811-ADAF3855C28E}"/>
+              </a:ext>
+            </a:extLst>
+          </p:cNvPr>
+          <p:cNvPicPr>
+            <a:picLocks noGrp="1" noChangeAspect="1"/>
+          </p:cNvPicPr>
           <p:nvPr>
             <p:ph type="pic" sz="quarter" idx="13"/>
           </p:nvPr>
-        </p:nvSpPr>
-        <p:spPr/>
-      </p:sp>
+        </p:nvPicPr>
+        <p:blipFill>
+          <a:blip r:embed="rId2"/>
+          <a:srcRect l="14209" r="14209"/>
+          <a:stretch/>
+        </p:blipFill>
+        <p:spPr>
+          <a:xfrm>
+            <a:off x="7379478" y="-1858"/>
+            <a:ext cx="4815003" cy="6861716"/>
+          </a:xfrm>
+          <a:prstGeom prst="rect">
+            <a:avLst/>
+          </a:prstGeom>
+          <a:blipFill>
+            <a:blip r:embed="rId3">
+              <a:alphaModFix amt="70000"/>
+              <a:extLst>
+                <a:ext uri="{28A0092B-C50C-407E-A947-70E740481C1C}">
+                  <a14:useLocalDpi xmlns:a14="http://schemas.microsoft.com/office/drawing/2010/main" val="0"/>
+                </a:ext>
+              </a:extLst>
+            </a:blip>
+            <a:stretch>
+              <a:fillRect/>
+            </a:stretch>
+          </a:blipFill>
+        </p:spPr>
+      </p:pic>
       <p:sp>
         <p:nvSpPr>
           <p:cNvPr id="5" name="日期占位符 4">

--- a/CEP Project1.pptx
+++ b/CEP Project1.pptx
@@ -8,6 +8,9 @@
     <p:sldId id="256" r:id="rId2"/>
     <p:sldId id="257" r:id="rId3"/>
     <p:sldId id="258" r:id="rId4"/>
+    <p:sldId id="259" r:id="rId5"/>
+    <p:sldId id="260" r:id="rId6"/>
+    <p:sldId id="261" r:id="rId7"/>
   </p:sldIdLst>
   <p:sldSz cx="12192000" cy="6858000"/>
   <p:notesSz cx="6858000" cy="9144000"/>
@@ -117,7 +120,7 @@
 <file path=ppt/revisionInfo.xml><?xml version="1.0" encoding="utf-8"?>
 <p1510:revInfo xmlns:a="http://schemas.openxmlformats.org/drawingml/2006/main" xmlns:r="http://schemas.openxmlformats.org/officeDocument/2006/relationships" xmlns:p1510="http://schemas.microsoft.com/office/powerpoint/2015/10/main">
   <p1510:revLst>
-    <p1510:client id="{FCD88B4F-AF11-E7C5-86CE-E53BD8F3758A}" v="329" dt="2026-10-19T23:37:57.190"/>
+    <p1510:client id="{FCD88B4F-AF11-E7C5-86CE-E53BD8F3758A}" v="654" dt="2026-10-20T02:50:21.729"/>
   </p1510:revLst>
 </p1510:revInfo>
 </file>
@@ -10493,13 +10496,19 @@
           <a:lstStyle/>
           <a:p>
             <a:r>
+              <a:rPr lang="zh-CN" altLang="en-US" sz="2000"/>
+              <a:t>This starts to getting popluar recently when people found out you can use claude to backwarding old games, they realized they can merge two game together, so here it is Minecraft Ring, Tobny Jacobs under the help of claude, he made minecraft into an elden ring mod, the gameplay of minecraft into Elden ring's boss fight.</a:t>
+            </a:r>
+            <a:br>
               <a:rPr lang="zh-CN" altLang="en-US" sz="2000" dirty="0"/>
-              <a:t>This was very popluar recently when Quince uploaded his video about Steve in Elden Ring. Even tho he didnt really mentioned how he exacly mashed two game, but using claude ai to merge games is popluar recently, and due to all </a:t>
-            </a:r>
-            <a:r>
-              <a:rPr lang="zh-CN" altLang="en-US" sz="2000"/>
-              <a:t>of stuff he added to Elden Ring, we assumed he used claude to help his creation.</a:t>
-            </a:r>
+            </a:br>
+            <a:r>
+              <a:rPr lang="en-US" altLang="en-US" sz="2000" dirty="0">
+                <a:hlinkClick r:id="rId2"/>
+              </a:rPr>
+              <a:t>https://x.com/i/trending/2104964358027542770?lang=en</a:t>
+            </a:r>
+            <a:endParaRPr lang="zh-CN" dirty="0"/>
           </a:p>
         </p:txBody>
       </p:sp>
@@ -10520,7 +10529,7 @@
           </p:nvPr>
         </p:nvPicPr>
         <p:blipFill>
-          <a:blip r:embed="rId2"/>
+          <a:blip r:embed="rId3"/>
           <a:srcRect l="14209" r="14209"/>
           <a:stretch/>
         </p:blipFill>
@@ -10528,6 +10537,704 @@
           <a:xfrm>
             <a:off x="7379478" y="-1858"/>
             <a:ext cx="4815003" cy="6861716"/>
+          </a:xfrm>
+          <a:prstGeom prst="rect">
+            <a:avLst/>
+          </a:prstGeom>
+          <a:blipFill>
+            <a:blip r:embed="rId4">
+              <a:alphaModFix amt="70000"/>
+              <a:extLst>
+                <a:ext uri="{28A0092B-C50C-407E-A947-70E740481C1C}">
+                  <a14:useLocalDpi xmlns:a14="http://schemas.microsoft.com/office/drawing/2010/main" val="0"/>
+                </a:ext>
+              </a:extLst>
+            </a:blip>
+            <a:stretch>
+              <a:fillRect/>
+            </a:stretch>
+          </a:blipFill>
+        </p:spPr>
+      </p:pic>
+      <p:sp>
+        <p:nvSpPr>
+          <p:cNvPr id="5" name="日期占位符 4">
+            <a:extLst>
+              <a:ext uri="{FF2B5EF4-FFF2-40B4-BE49-F238E27FC236}">
+                <a16:creationId xmlns:a16="http://schemas.microsoft.com/office/drawing/2014/main" id="{A603A570-C1FD-C38E-C890-5DD60BD77FD9}"/>
+              </a:ext>
+            </a:extLst>
+          </p:cNvPr>
+          <p:cNvSpPr>
+            <a:spLocks noGrp="1"/>
+          </p:cNvSpPr>
+          <p:nvPr>
+            <p:ph type="dt" sz="half" idx="15"/>
+          </p:nvPr>
+        </p:nvSpPr>
+        <p:spPr/>
+        <p:txBody>
+          <a:bodyPr/>
+          <a:lstStyle/>
+          <a:p>
+            <a:fld id="{46629CC3-DDA9-4E2E-ADEB-8833284B881E}" type="datetime1">
+              <a:t>2026/10/19</a:t>
+            </a:fld>
+            <a:endParaRPr lang="en-US" dirty="0"/>
+          </a:p>
+        </p:txBody>
+      </p:sp>
+      <p:sp>
+        <p:nvSpPr>
+          <p:cNvPr id="6" name="页脚占位符 5">
+            <a:extLst>
+              <a:ext uri="{FF2B5EF4-FFF2-40B4-BE49-F238E27FC236}">
+                <a16:creationId xmlns:a16="http://schemas.microsoft.com/office/drawing/2014/main" id="{038DA945-48A3-5B5D-3B50-46FB1BF5B4ED}"/>
+              </a:ext>
+            </a:extLst>
+          </p:cNvPr>
+          <p:cNvSpPr>
+            <a:spLocks noGrp="1"/>
+          </p:cNvSpPr>
+          <p:nvPr>
+            <p:ph type="ftr" sz="quarter" idx="16"/>
+          </p:nvPr>
+        </p:nvSpPr>
+        <p:spPr/>
+        <p:txBody>
+          <a:bodyPr/>
+          <a:lstStyle/>
+          <a:p>
+            <a:r>
+              <a:rPr lang="en-US" dirty="0"/>
+              <a:t>
+              </a:t>
+            </a:r>
+          </a:p>
+        </p:txBody>
+      </p:sp>
+      <p:sp>
+        <p:nvSpPr>
+          <p:cNvPr id="7" name="灯片编号占位符 6">
+            <a:extLst>
+              <a:ext uri="{FF2B5EF4-FFF2-40B4-BE49-F238E27FC236}">
+                <a16:creationId xmlns:a16="http://schemas.microsoft.com/office/drawing/2014/main" id="{A46439FA-9170-80DA-7C38-00066E9D42BF}"/>
+              </a:ext>
+            </a:extLst>
+          </p:cNvPr>
+          <p:cNvSpPr>
+            <a:spLocks noGrp="1"/>
+          </p:cNvSpPr>
+          <p:nvPr>
+            <p:ph type="sldNum" sz="quarter" idx="17"/>
+          </p:nvPr>
+        </p:nvSpPr>
+        <p:spPr/>
+        <p:txBody>
+          <a:bodyPr/>
+          <a:lstStyle/>
+          <a:p>
+            <a:fld id="{2DE90F28-AFBB-4AB2-AA79-6D3F72ED131B}" type="slidenum">
+              <a:rPr lang="en-US" dirty="0"/>
+              <a:pPr/>
+              <a:t>3</a:t>
+            </a:fld>
+            <a:endParaRPr lang="en-US" dirty="0"/>
+          </a:p>
+        </p:txBody>
+      </p:sp>
+    </p:spTree>
+    <p:extLst>
+      <p:ext uri="{BB962C8B-B14F-4D97-AF65-F5344CB8AC3E}">
+        <p14:creationId xmlns:p14="http://schemas.microsoft.com/office/powerpoint/2010/main" val="4275945225"/>
+      </p:ext>
+    </p:extLst>
+  </p:cSld>
+  <p:clrMapOvr>
+    <a:masterClrMapping/>
+  </p:clrMapOvr>
+</p:sld>
+</file>
+
+<file path=ppt/slides/slide4.xml><?xml version="1.0" encoding="utf-8"?>
+<p:sld xmlns:a="http://schemas.openxmlformats.org/drawingml/2006/main" xmlns:r="http://schemas.openxmlformats.org/officeDocument/2006/relationships" xmlns:p="http://schemas.openxmlformats.org/presentationml/2006/main">
+  <p:cSld>
+    <p:spTree>
+      <p:nvGrpSpPr>
+        <p:cNvPr id="1" name=""/>
+        <p:cNvGrpSpPr/>
+        <p:nvPr/>
+      </p:nvGrpSpPr>
+      <p:grpSpPr>
+        <a:xfrm>
+          <a:off x="0" y="0"/>
+          <a:ext cx="0" cy="0"/>
+          <a:chOff x="0" y="0"/>
+          <a:chExt cx="0" cy="0"/>
+        </a:xfrm>
+      </p:grpSpPr>
+      <p:sp>
+        <p:nvSpPr>
+          <p:cNvPr id="2" name="标题 1">
+            <a:extLst>
+              <a:ext uri="{FF2B5EF4-FFF2-40B4-BE49-F238E27FC236}">
+                <a16:creationId xmlns:a16="http://schemas.microsoft.com/office/drawing/2014/main" id="{2110C3A3-54C9-A314-B35B-84CF13DE39A5}"/>
+              </a:ext>
+            </a:extLst>
+          </p:cNvPr>
+          <p:cNvSpPr>
+            <a:spLocks noGrp="1"/>
+          </p:cNvSpPr>
+          <p:nvPr>
+            <p:ph type="title"/>
+          </p:nvPr>
+        </p:nvSpPr>
+        <p:spPr>
+          <a:xfrm>
+            <a:off x="731520" y="365760"/>
+            <a:ext cx="10741152" cy="1132258"/>
+          </a:xfrm>
+        </p:spPr>
+        <p:txBody>
+          <a:bodyPr anchor="b">
+            <a:normAutofit/>
+          </a:bodyPr>
+          <a:lstStyle/>
+          <a:p>
+            <a:r>
+              <a:rPr lang="zh-CN" altLang="en-US"/>
+              <a:t>How does it work?</a:t>
+            </a:r>
+          </a:p>
+        </p:txBody>
+      </p:sp>
+      <p:sp>
+        <p:nvSpPr>
+          <p:cNvPr id="6" name="页脚占位符 5">
+            <a:extLst>
+              <a:ext uri="{FF2B5EF4-FFF2-40B4-BE49-F238E27FC236}">
+                <a16:creationId xmlns:a16="http://schemas.microsoft.com/office/drawing/2014/main" id="{E98EEF62-6833-4941-8281-D99E885147AC}"/>
+              </a:ext>
+            </a:extLst>
+          </p:cNvPr>
+          <p:cNvSpPr>
+            <a:spLocks noGrp="1"/>
+          </p:cNvSpPr>
+          <p:nvPr>
+            <p:ph type="ftr" sz="quarter" idx="11"/>
+          </p:nvPr>
+        </p:nvSpPr>
+        <p:spPr>
+          <a:xfrm rot="16200000">
+            <a:off x="-1131161" y="1592957"/>
+            <a:ext cx="2973522" cy="365125"/>
+          </a:xfrm>
+        </p:spPr>
+        <p:txBody>
+          <a:bodyPr anchor="ctr">
+            <a:normAutofit/>
+          </a:bodyPr>
+          <a:lstStyle/>
+          <a:p>
+            <a:pPr>
+              <a:lnSpc>
+                <a:spcPct val="90000"/>
+              </a:lnSpc>
+              <a:spcAft>
+                <a:spcPts val="600"/>
+              </a:spcAft>
+            </a:pPr>
+            <a:r>
+              <a:rPr lang="en-US" sz="700"/>
+              <a:t>
+              </a:t>
+            </a:r>
+          </a:p>
+        </p:txBody>
+      </p:sp>
+      <p:sp>
+        <p:nvSpPr>
+          <p:cNvPr id="3" name="内容占位符 2">
+            <a:extLst>
+              <a:ext uri="{FF2B5EF4-FFF2-40B4-BE49-F238E27FC236}">
+                <a16:creationId xmlns:a16="http://schemas.microsoft.com/office/drawing/2014/main" id="{22CCE6BE-AB93-B6EF-F6A9-A68FC54E2C2A}"/>
+              </a:ext>
+            </a:extLst>
+          </p:cNvPr>
+          <p:cNvSpPr>
+            <a:spLocks noGrp="1"/>
+          </p:cNvSpPr>
+          <p:nvPr>
+            <p:ph idx="1"/>
+          </p:nvPr>
+        </p:nvSpPr>
+        <p:spPr>
+          <a:xfrm>
+            <a:off x="731520" y="1658679"/>
+            <a:ext cx="10780776" cy="4925000"/>
+          </a:xfrm>
+        </p:spPr>
+        <p:txBody>
+          <a:bodyPr vert="horz" lIns="91440" tIns="45720" rIns="91440" bIns="45720" rtlCol="0" anchor="t">
+            <a:normAutofit/>
+          </a:bodyPr>
+          <a:lstStyle/>
+          <a:p>
+            <a:r>
+              <a:rPr lang="zh-CN" altLang="en-US"/>
+              <a:t>The most common way is: </a:t>
+            </a:r>
+            <a:r>
+              <a:rPr lang="zh-CN" b="1"/>
+              <a:t>The Bridge Method</a:t>
+            </a:r>
+            <a:endParaRPr lang="zh-CN"/>
+          </a:p>
+          <a:p>
+            <a:r>
+              <a:rPr lang="zh-CN" dirty="0"/>
+              <a:t>Two original games run simultaneously in the background on your PC while communicating through shared memory to sync player positions, physics, and world hits</a:t>
+            </a:r>
+            <a:r>
+              <a:rPr lang="en-US" altLang="zh-CN" dirty="0"/>
+              <a:t>. (This is how Minecraft run inside Elden ring)</a:t>
+            </a:r>
+            <a:br>
+              <a:rPr lang="en-US" altLang="zh-CN" dirty="0"/>
+            </a:br>
+            <a:r>
+              <a:rPr lang="en-US" altLang="zh-CN" dirty="0"/>
+              <a:t>It's doesn't has to be an AI to write the code in this way, buy AI is more efficient than human when it comes to "well known" ideas.</a:t>
+            </a:r>
+          </a:p>
+        </p:txBody>
+      </p:sp>
+      <p:sp>
+        <p:nvSpPr>
+          <p:cNvPr id="5" name="日期占位符 4">
+            <a:extLst>
+              <a:ext uri="{FF2B5EF4-FFF2-40B4-BE49-F238E27FC236}">
+                <a16:creationId xmlns:a16="http://schemas.microsoft.com/office/drawing/2014/main" id="{EE84C587-1D6F-7F17-A31E-554E02166BF1}"/>
+              </a:ext>
+            </a:extLst>
+          </p:cNvPr>
+          <p:cNvSpPr>
+            <a:spLocks noGrp="1"/>
+          </p:cNvSpPr>
+          <p:nvPr>
+            <p:ph type="dt" sz="half" idx="10"/>
+          </p:nvPr>
+        </p:nvSpPr>
+        <p:spPr>
+          <a:xfrm rot="5400000">
+            <a:off x="10425981" y="4687095"/>
+            <a:ext cx="2706690" cy="365125"/>
+          </a:xfrm>
+        </p:spPr>
+        <p:txBody>
+          <a:bodyPr anchor="ctr">
+            <a:normAutofit/>
+          </a:bodyPr>
+          <a:lstStyle/>
+          <a:p>
+            <a:pPr>
+              <a:spcAft>
+                <a:spcPts val="600"/>
+              </a:spcAft>
+            </a:pPr>
+            <a:fld id="{00FCD2DC-5B13-4687-B869-006845A49443}" type="datetime1">
+              <a:rPr lang="en-US"/>
+              <a:pPr>
+                <a:spcAft>
+                  <a:spcPts val="600"/>
+                </a:spcAft>
+              </a:pPr>
+              <a:t>10/19/2026</a:t>
+            </a:fld>
+            <a:endParaRPr lang="en-US"/>
+          </a:p>
+        </p:txBody>
+      </p:sp>
+      <p:sp>
+        <p:nvSpPr>
+          <p:cNvPr id="7" name="灯片编号占位符 6">
+            <a:extLst>
+              <a:ext uri="{FF2B5EF4-FFF2-40B4-BE49-F238E27FC236}">
+                <a16:creationId xmlns:a16="http://schemas.microsoft.com/office/drawing/2014/main" id="{E80C0A1D-B98D-A01E-E526-D13BC11E5757}"/>
+              </a:ext>
+            </a:extLst>
+          </p:cNvPr>
+          <p:cNvSpPr>
+            <a:spLocks noGrp="1"/>
+          </p:cNvSpPr>
+          <p:nvPr>
+            <p:ph type="sldNum" sz="quarter" idx="12"/>
+          </p:nvPr>
+        </p:nvSpPr>
+        <p:spPr>
+          <a:xfrm>
+            <a:off x="11512296" y="6356350"/>
+            <a:ext cx="574620" cy="365125"/>
+          </a:xfrm>
+        </p:spPr>
+        <p:txBody>
+          <a:bodyPr anchor="ctr">
+            <a:normAutofit/>
+          </a:bodyPr>
+          <a:lstStyle/>
+          <a:p>
+            <a:pPr>
+              <a:spcAft>
+                <a:spcPts val="600"/>
+              </a:spcAft>
+            </a:pPr>
+            <a:fld id="{2DE90F28-AFBB-4AB2-AA79-6D3F72ED131B}" type="slidenum">
+              <a:rPr lang="en-US" dirty="0"/>
+              <a:pPr>
+                <a:spcAft>
+                  <a:spcPts val="600"/>
+                </a:spcAft>
+              </a:pPr>
+              <a:t>4</a:t>
+            </a:fld>
+            <a:endParaRPr lang="en-US"/>
+          </a:p>
+        </p:txBody>
+      </p:sp>
+    </p:spTree>
+    <p:extLst>
+      <p:ext uri="{BB962C8B-B14F-4D97-AF65-F5344CB8AC3E}">
+        <p14:creationId xmlns:p14="http://schemas.microsoft.com/office/powerpoint/2010/main" val="1326243887"/>
+      </p:ext>
+    </p:extLst>
+  </p:cSld>
+  <p:clrMapOvr>
+    <a:masterClrMapping/>
+  </p:clrMapOvr>
+</p:sld>
+</file>
+
+<file path=ppt/slides/slide5.xml><?xml version="1.0" encoding="utf-8"?>
+<p:sld xmlns:a="http://schemas.openxmlformats.org/drawingml/2006/main" xmlns:r="http://schemas.openxmlformats.org/officeDocument/2006/relationships" xmlns:p="http://schemas.openxmlformats.org/presentationml/2006/main">
+  <p:cSld>
+    <p:spTree>
+      <p:nvGrpSpPr>
+        <p:cNvPr id="1" name=""/>
+        <p:cNvGrpSpPr/>
+        <p:nvPr/>
+      </p:nvGrpSpPr>
+      <p:grpSpPr>
+        <a:xfrm>
+          <a:off x="0" y="0"/>
+          <a:ext cx="0" cy="0"/>
+          <a:chOff x="0" y="0"/>
+          <a:chExt cx="0" cy="0"/>
+        </a:xfrm>
+      </p:grpSpPr>
+      <p:sp>
+        <p:nvSpPr>
+          <p:cNvPr id="2" name="标题 1">
+            <a:extLst>
+              <a:ext uri="{FF2B5EF4-FFF2-40B4-BE49-F238E27FC236}">
+                <a16:creationId xmlns:a16="http://schemas.microsoft.com/office/drawing/2014/main" id="{27B77CA5-B706-5DE8-8C81-9B84477ED75F}"/>
+              </a:ext>
+            </a:extLst>
+          </p:cNvPr>
+          <p:cNvSpPr>
+            <a:spLocks noGrp="1"/>
+          </p:cNvSpPr>
+          <p:nvPr>
+            <p:ph type="title"/>
+          </p:nvPr>
+        </p:nvSpPr>
+        <p:spPr/>
+        <p:txBody>
+          <a:bodyPr/>
+          <a:lstStyle/>
+          <a:p>
+            <a:r>
+              <a:rPr lang="zh-CN" altLang="en-US"/>
+              <a:t>Why does it matter?</a:t>
+            </a:r>
+          </a:p>
+        </p:txBody>
+      </p:sp>
+      <p:sp>
+        <p:nvSpPr>
+          <p:cNvPr id="3" name="内容占位符 2">
+            <a:extLst>
+              <a:ext uri="{FF2B5EF4-FFF2-40B4-BE49-F238E27FC236}">
+                <a16:creationId xmlns:a16="http://schemas.microsoft.com/office/drawing/2014/main" id="{17094434-50D2-54D2-EEA8-2942724B3AFB}"/>
+              </a:ext>
+            </a:extLst>
+          </p:cNvPr>
+          <p:cNvSpPr>
+            <a:spLocks noGrp="1"/>
+          </p:cNvSpPr>
+          <p:nvPr>
+            <p:ph sz="quarter" idx="14"/>
+          </p:nvPr>
+        </p:nvSpPr>
+        <p:spPr/>
+        <p:txBody>
+          <a:bodyPr vert="horz" lIns="91440" tIns="45720" rIns="91440" bIns="45720" rtlCol="0" anchor="t">
+            <a:normAutofit/>
+          </a:bodyPr>
+          <a:lstStyle/>
+          <a:p>
+            <a:pPr marL="285750" indent="-285750">
+              <a:buFont typeface="Arial"/>
+              <a:buChar char="•"/>
+            </a:pPr>
+            <a:r>
+              <a:rPr lang="zh-CN" dirty="0">
+                <a:ea typeface="+mn-lt"/>
+                <a:cs typeface="+mn-lt"/>
+              </a:rPr>
+              <a:t>AI </a:t>
+            </a:r>
+            <a:r>
+              <a:rPr lang="en-US" altLang="zh-CN" dirty="0">
+                <a:ea typeface="+mn-lt"/>
+                <a:cs typeface="+mn-lt"/>
+              </a:rPr>
+              <a:t>vibe</a:t>
+            </a:r>
+            <a:r>
+              <a:rPr lang="zh-CN" altLang="en-US" dirty="0">
+                <a:ea typeface="+mn-lt"/>
+                <a:cs typeface="+mn-lt"/>
+              </a:rPr>
+              <a:t> </a:t>
+            </a:r>
+            <a:r>
+              <a:rPr lang="zh-CN" dirty="0">
+                <a:ea typeface="+mn-lt"/>
+                <a:cs typeface="+mn-lt"/>
+              </a:rPr>
+              <a:t>coding may help small teams t</a:t>
+            </a:r>
+            <a:r>
+              <a:rPr lang="en-US" altLang="zh-CN" dirty="0">
+                <a:ea typeface="+mn-lt"/>
+                <a:cs typeface="+mn-lt"/>
+              </a:rPr>
+              <a:t>o</a:t>
+            </a:r>
+            <a:r>
+              <a:rPr lang="zh-CN" dirty="0">
+                <a:ea typeface="+mn-lt"/>
+                <a:cs typeface="+mn-lt"/>
+              </a:rPr>
+              <a:t> </a:t>
+            </a:r>
+            <a:r>
+              <a:rPr lang="en-US" altLang="zh-CN" dirty="0">
+                <a:ea typeface="+mn-lt"/>
+                <a:cs typeface="+mn-lt"/>
+              </a:rPr>
+              <a:t>b</a:t>
+            </a:r>
+            <a:r>
+              <a:rPr lang="zh-CN" dirty="0">
+                <a:ea typeface="+mn-lt"/>
+                <a:cs typeface="+mn-lt"/>
+              </a:rPr>
+              <a:t>e </a:t>
+            </a:r>
+            <a:r>
+              <a:rPr lang="en-US" altLang="zh-CN" dirty="0">
+                <a:ea typeface="+mn-lt"/>
+                <a:cs typeface="+mn-lt"/>
+              </a:rPr>
+              <a:t>more</a:t>
+            </a:r>
+            <a:r>
+              <a:rPr lang="zh-CN" dirty="0">
+                <a:ea typeface="+mn-lt"/>
+                <a:cs typeface="+mn-lt"/>
+              </a:rPr>
+              <a:t> e</a:t>
+            </a:r>
+            <a:r>
+              <a:rPr lang="en-US" altLang="zh-CN" dirty="0" err="1">
+                <a:ea typeface="+mn-lt"/>
+                <a:cs typeface="+mn-lt"/>
+              </a:rPr>
+              <a:t>fficient</a:t>
+            </a:r>
+            <a:r>
+              <a:rPr lang="en-US" altLang="zh-CN" dirty="0">
+                <a:ea typeface="+mn-lt"/>
+                <a:cs typeface="+mn-lt"/>
+              </a:rPr>
+              <a:t> not just mashup games.</a:t>
+            </a:r>
+            <a:endParaRPr lang="zh-CN" altLang="en-US" dirty="0"/>
+          </a:p>
+          <a:p>
+            <a:pPr marL="285750" indent="-285750">
+              <a:buFont typeface="Arial"/>
+              <a:buChar char="•"/>
+            </a:pPr>
+            <a:r>
+              <a:rPr lang="en-US" altLang="zh-CN">
+                <a:ea typeface="+mn-lt"/>
+                <a:cs typeface="+mn-lt"/>
+              </a:rPr>
+              <a:t>M</a:t>
+            </a:r>
+            <a:r>
+              <a:rPr lang="zh-CN">
+                <a:ea typeface="+mn-lt"/>
+                <a:cs typeface="+mn-lt"/>
+              </a:rPr>
+              <a:t>ashups can</a:t>
+            </a:r>
+            <a:r>
+              <a:rPr lang="zh-CN" altLang="en-US" dirty="0">
+                <a:ea typeface="+mn-lt"/>
+                <a:cs typeface="+mn-lt"/>
+              </a:rPr>
+              <a:t> </a:t>
+            </a:r>
+            <a:r>
+              <a:rPr lang="zh-CN">
+                <a:ea typeface="+mn-lt"/>
+                <a:cs typeface="+mn-lt"/>
+              </a:rPr>
+              <a:t>offer a way to experiment with new gameplay ideas.</a:t>
+            </a:r>
+            <a:endParaRPr lang="zh-CN"/>
+          </a:p>
+          <a:p>
+            <a:pPr marL="285750" indent="-285750">
+              <a:buFont typeface="Arial"/>
+              <a:buChar char="•"/>
+            </a:pPr>
+            <a:r>
+              <a:rPr lang="zh-CN">
+                <a:ea typeface="+mn-lt"/>
+                <a:cs typeface="+mn-lt"/>
+              </a:rPr>
+              <a:t>Compatibility and testing remain major challenges</a:t>
+            </a:r>
+            <a:r>
+              <a:rPr lang="en-US" altLang="zh-CN">
+                <a:ea typeface="+mn-lt"/>
+                <a:cs typeface="+mn-lt"/>
+              </a:rPr>
+              <a:t>,</a:t>
+            </a:r>
+            <a:r>
+              <a:rPr lang="zh-CN" altLang="en-US" dirty="0">
+                <a:ea typeface="+mn-lt"/>
+                <a:cs typeface="+mn-lt"/>
+              </a:rPr>
+              <a:t> </a:t>
+            </a:r>
+            <a:r>
+              <a:rPr lang="en-US" altLang="zh-CN">
+                <a:ea typeface="+mn-lt"/>
+                <a:cs typeface="+mn-lt"/>
+              </a:rPr>
+              <a:t>B</a:t>
+            </a:r>
+            <a:r>
+              <a:rPr lang="zh-CN">
+                <a:ea typeface="+mn-lt"/>
+                <a:cs typeface="+mn-lt"/>
+              </a:rPr>
+              <a:t>u</a:t>
+            </a:r>
+            <a:r>
+              <a:rPr lang="en-US" altLang="zh-CN">
+                <a:ea typeface="+mn-lt"/>
+                <a:cs typeface="+mn-lt"/>
+              </a:rPr>
+              <a:t>t</a:t>
+            </a:r>
+            <a:r>
+              <a:rPr lang="zh-CN" dirty="0">
+                <a:ea typeface="+mn-lt"/>
+                <a:cs typeface="+mn-lt"/>
+              </a:rPr>
+              <a:t> </a:t>
+            </a:r>
+            <a:r>
+              <a:rPr lang="en-US" altLang="zh-CN">
+                <a:ea typeface="+mn-lt"/>
+                <a:cs typeface="+mn-lt"/>
+              </a:rPr>
+              <a:t>this</a:t>
+            </a:r>
+            <a:r>
+              <a:rPr lang="zh-CN" dirty="0">
+                <a:ea typeface="+mn-lt"/>
+                <a:cs typeface="+mn-lt"/>
+              </a:rPr>
+              <a:t> </a:t>
+            </a:r>
+            <a:r>
+              <a:rPr lang="en-US" altLang="zh-CN">
+                <a:ea typeface="+mn-lt"/>
+                <a:cs typeface="+mn-lt"/>
+              </a:rPr>
+              <a:t>can</a:t>
+            </a:r>
+            <a:r>
+              <a:rPr lang="zh-CN">
+                <a:ea typeface="+mn-lt"/>
+                <a:cs typeface="+mn-lt"/>
+              </a:rPr>
+              <a:t> b</a:t>
+            </a:r>
+            <a:r>
+              <a:rPr lang="en-US" altLang="zh-CN">
+                <a:ea typeface="+mn-lt"/>
+                <a:cs typeface="+mn-lt"/>
+              </a:rPr>
+              <a:t>e</a:t>
+            </a:r>
+            <a:r>
+              <a:rPr lang="zh-CN" altLang="en-US">
+                <a:ea typeface="+mn-lt"/>
+                <a:cs typeface="+mn-lt"/>
+              </a:rPr>
+              <a:t> reduced alot when AI steps in to help debugging</a:t>
+            </a:r>
+            <a:endParaRPr lang="zh-CN" altLang="en-US"/>
+          </a:p>
+          <a:p>
+            <a:endParaRPr lang="zh-CN" altLang="en-US" dirty="0"/>
+          </a:p>
+        </p:txBody>
+      </p:sp>
+      <p:pic>
+        <p:nvPicPr>
+          <p:cNvPr id="8" name="图片占位符 7" descr="屏幕上有字&#10;&#10;AI 生成的内容可能不正确。">
+            <a:extLst>
+              <a:ext uri="{FF2B5EF4-FFF2-40B4-BE49-F238E27FC236}">
+                <a16:creationId xmlns:a16="http://schemas.microsoft.com/office/drawing/2014/main" id="{6BC15CBF-A33B-65F6-894B-2C2FAC65411F}"/>
+              </a:ext>
+            </a:extLst>
+          </p:cNvPr>
+          <p:cNvPicPr>
+            <a:picLocks noGrp="1" noChangeAspect="1"/>
+          </p:cNvPicPr>
+          <p:nvPr>
+            <p:ph type="pic" sz="quarter" idx="13"/>
+          </p:nvPr>
+        </p:nvPicPr>
+        <p:blipFill>
+          <a:blip r:embed="rId2"/>
+          <a:srcRect t="2171" b="2171"/>
+          <a:stretch/>
+        </p:blipFill>
+        <p:spPr>
+          <a:xfrm>
+            <a:off x="7391738" y="1587"/>
+            <a:ext cx="4798482" cy="6854825"/>
           </a:xfrm>
           <a:prstGeom prst="rect">
             <a:avLst/>
@@ -10552,7 +11259,7 @@
           <p:cNvPr id="5" name="日期占位符 4">
             <a:extLst>
               <a:ext uri="{FF2B5EF4-FFF2-40B4-BE49-F238E27FC236}">
-                <a16:creationId xmlns:a16="http://schemas.microsoft.com/office/drawing/2014/main" id="{A603A570-C1FD-C38E-C890-5DD60BD77FD9}"/>
+                <a16:creationId xmlns:a16="http://schemas.microsoft.com/office/drawing/2014/main" id="{146ABDA1-5FC5-39B5-176B-26CC9BFF2CEE}"/>
               </a:ext>
             </a:extLst>
           </p:cNvPr>
@@ -10568,7 +11275,7 @@
           <a:bodyPr/>
           <a:lstStyle/>
           <a:p>
-            <a:fld id="{46629CC3-DDA9-4E2E-ADEB-8833284B881E}" type="datetime1">
+            <a:fld id="{49F5C17A-3406-4CD5-9D32-1E98A54E38BD}" type="datetime1">
               <a:t>10/19/2026</a:t>
             </a:fld>
             <a:endParaRPr lang="en-US" dirty="0"/>
@@ -10580,7 +11287,7 @@
           <p:cNvPr id="6" name="页脚占位符 5">
             <a:extLst>
               <a:ext uri="{FF2B5EF4-FFF2-40B4-BE49-F238E27FC236}">
-                <a16:creationId xmlns:a16="http://schemas.microsoft.com/office/drawing/2014/main" id="{038DA945-48A3-5B5D-3B50-46FB1BF5B4ED}"/>
+                <a16:creationId xmlns:a16="http://schemas.microsoft.com/office/drawing/2014/main" id="{AE795172-C157-7774-D8C5-5AF97EA26743}"/>
               </a:ext>
             </a:extLst>
           </p:cNvPr>
@@ -10609,7 +11316,7 @@
           <p:cNvPr id="7" name="灯片编号占位符 6">
             <a:extLst>
               <a:ext uri="{FF2B5EF4-FFF2-40B4-BE49-F238E27FC236}">
-                <a16:creationId xmlns:a16="http://schemas.microsoft.com/office/drawing/2014/main" id="{A46439FA-9170-80DA-7C38-00066E9D42BF}"/>
+                <a16:creationId xmlns:a16="http://schemas.microsoft.com/office/drawing/2014/main" id="{8BC62215-D816-1966-2071-89E85A666198}"/>
               </a:ext>
             </a:extLst>
           </p:cNvPr>
@@ -10628,7 +11335,7 @@
             <a:fld id="{2DE90F28-AFBB-4AB2-AA79-6D3F72ED131B}" type="slidenum">
               <a:rPr lang="en-US" dirty="0"/>
               <a:pPr/>
-              <a:t>3</a:t>
+              <a:t>5</a:t>
             </a:fld>
             <a:endParaRPr lang="en-US" dirty="0"/>
           </a:p>
@@ -10637,7 +11344,277 @@
     </p:spTree>
     <p:extLst>
       <p:ext uri="{BB962C8B-B14F-4D97-AF65-F5344CB8AC3E}">
-        <p14:creationId xmlns:p14="http://schemas.microsoft.com/office/powerpoint/2010/main" val="4275945225"/>
+        <p14:creationId xmlns:p14="http://schemas.microsoft.com/office/powerpoint/2010/main" val="2630827895"/>
+      </p:ext>
+    </p:extLst>
+  </p:cSld>
+  <p:clrMapOvr>
+    <a:masterClrMapping/>
+  </p:clrMapOvr>
+</p:sld>
+</file>
+
+<file path=ppt/slides/slide6.xml><?xml version="1.0" encoding="utf-8"?>
+<p:sld xmlns:a="http://schemas.openxmlformats.org/drawingml/2006/main" xmlns:r="http://schemas.openxmlformats.org/officeDocument/2006/relationships" xmlns:p="http://schemas.openxmlformats.org/presentationml/2006/main">
+  <p:cSld>
+    <p:spTree>
+      <p:nvGrpSpPr>
+        <p:cNvPr id="1" name=""/>
+        <p:cNvGrpSpPr/>
+        <p:nvPr/>
+      </p:nvGrpSpPr>
+      <p:grpSpPr>
+        <a:xfrm>
+          <a:off x="0" y="0"/>
+          <a:ext cx="0" cy="0"/>
+          <a:chOff x="0" y="0"/>
+          <a:chExt cx="0" cy="0"/>
+        </a:xfrm>
+      </p:grpSpPr>
+      <p:sp>
+        <p:nvSpPr>
+          <p:cNvPr id="2" name="标题 1">
+            <a:extLst>
+              <a:ext uri="{FF2B5EF4-FFF2-40B4-BE49-F238E27FC236}">
+                <a16:creationId xmlns:a16="http://schemas.microsoft.com/office/drawing/2014/main" id="{5663ED4C-8C5D-3666-07B3-3E224EA53D3F}"/>
+              </a:ext>
+            </a:extLst>
+          </p:cNvPr>
+          <p:cNvSpPr>
+            <a:spLocks noGrp="1"/>
+          </p:cNvSpPr>
+          <p:nvPr>
+            <p:ph type="title"/>
+          </p:nvPr>
+        </p:nvSpPr>
+        <p:spPr/>
+        <p:txBody>
+          <a:bodyPr/>
+          <a:lstStyle/>
+          <a:p>
+            <a:r>
+              <a:rPr lang="zh-CN"/>
+              <a:t>CONCLUSION</a:t>
+            </a:r>
+          </a:p>
+        </p:txBody>
+      </p:sp>
+      <p:sp>
+        <p:nvSpPr>
+          <p:cNvPr id="3" name="内容占位符 2">
+            <a:extLst>
+              <a:ext uri="{FF2B5EF4-FFF2-40B4-BE49-F238E27FC236}">
+                <a16:creationId xmlns:a16="http://schemas.microsoft.com/office/drawing/2014/main" id="{1B6F6BD9-37CC-6A65-D0A0-1BF390D7CF89}"/>
+              </a:ext>
+            </a:extLst>
+          </p:cNvPr>
+          <p:cNvSpPr>
+            <a:spLocks noGrp="1"/>
+          </p:cNvSpPr>
+          <p:nvPr>
+            <p:ph sz="quarter" idx="14"/>
+          </p:nvPr>
+        </p:nvSpPr>
+        <p:spPr/>
+        <p:txBody>
+          <a:bodyPr vert="horz" lIns="91440" tIns="45720" rIns="91440" bIns="45720" rtlCol="0" anchor="t">
+            <a:normAutofit/>
+          </a:bodyPr>
+          <a:lstStyle/>
+          <a:p>
+            <a:r>
+              <a:rPr lang="zh-CN" dirty="0"/>
+              <a:t>AI </a:t>
+            </a:r>
+            <a:r>
+              <a:rPr lang="en-US" altLang="zh-CN" dirty="0"/>
+              <a:t>v</a:t>
+            </a:r>
+            <a:r>
+              <a:rPr lang="zh-CN" dirty="0"/>
+              <a:t>i</a:t>
+            </a:r>
+            <a:r>
+              <a:rPr lang="en-US" altLang="zh-CN" dirty="0"/>
+              <a:t>be</a:t>
+            </a:r>
+            <a:r>
+              <a:rPr lang="zh-CN" dirty="0"/>
+              <a:t> </a:t>
+            </a:r>
+            <a:r>
+              <a:rPr lang="en-US" altLang="zh-CN"/>
+              <a:t>coding </a:t>
+            </a:r>
+            <a:r>
+              <a:rPr lang="zh-CN" dirty="0"/>
+              <a:t>may help more creators experiment with game </a:t>
+            </a:r>
+            <a:r>
+              <a:rPr lang="zh-CN"/>
+              <a:t>mashups</a:t>
+            </a:r>
+            <a:r>
+              <a:rPr lang="en-US" altLang="zh-CN"/>
+              <a:t>,</a:t>
+            </a:r>
+            <a:r>
+              <a:rPr lang="zh-CN" altLang="en-US" dirty="0"/>
+              <a:t> </a:t>
+            </a:r>
+            <a:r>
+              <a:rPr lang="en-US" altLang="zh-CN"/>
+              <a:t>but d</a:t>
+            </a:r>
+            <a:r>
+              <a:rPr lang="zh-CN"/>
+              <a:t>evelopers still need to connect the games reliably and </a:t>
+            </a:r>
+            <a:r>
+              <a:rPr lang="zh-CN" dirty="0"/>
+              <a:t>test the result.</a:t>
+            </a:r>
+          </a:p>
+          <a:p>
+            <a:endParaRPr lang="zh-CN" altLang="en-US" dirty="0"/>
+          </a:p>
+          <a:p>
+            <a:r>
+              <a:rPr lang="zh-CN" altLang="en-US"/>
+              <a:t>Minecraft Ring: </a:t>
+            </a:r>
+            <a:r>
+              <a:rPr lang="zh-CN" altLang="en-US" dirty="0">
+                <a:hlinkClick r:id="rId2"/>
+              </a:rPr>
+              <a:t>https://www.youtube.com/watch?v=TmgAK5JjcDM</a:t>
+            </a:r>
+            <a:br>
+              <a:rPr lang="zh-CN" altLang="en-US" dirty="0"/>
+            </a:br>
+            <a:r>
+              <a:rPr lang="zh-CN" altLang="en-US"/>
+              <a:t>Some software helps with merge games: </a:t>
+            </a:r>
+            <a:r>
+              <a:rPr lang="zh-CN" altLang="en-US" dirty="0">
+                <a:hlinkClick r:id="rId3"/>
+              </a:rPr>
+              <a:t>https://melty.gg/</a:t>
+            </a:r>
+            <a:endParaRPr lang="zh-CN" altLang="en-US" dirty="0"/>
+          </a:p>
+        </p:txBody>
+      </p:sp>
+      <p:sp>
+        <p:nvSpPr>
+          <p:cNvPr id="4" name="图片占位符 3">
+            <a:extLst>
+              <a:ext uri="{FF2B5EF4-FFF2-40B4-BE49-F238E27FC236}">
+                <a16:creationId xmlns:a16="http://schemas.microsoft.com/office/drawing/2014/main" id="{37ED6DAD-C971-9E33-3DAC-62F907A7BBBD}"/>
+              </a:ext>
+            </a:extLst>
+          </p:cNvPr>
+          <p:cNvSpPr>
+            <a:spLocks noGrp="1" noChangeAspect="1"/>
+          </p:cNvSpPr>
+          <p:nvPr>
+            <p:ph type="pic" sz="quarter" idx="13"/>
+          </p:nvPr>
+        </p:nvSpPr>
+        <p:spPr/>
+      </p:sp>
+      <p:sp>
+        <p:nvSpPr>
+          <p:cNvPr id="5" name="日期占位符 4">
+            <a:extLst>
+              <a:ext uri="{FF2B5EF4-FFF2-40B4-BE49-F238E27FC236}">
+                <a16:creationId xmlns:a16="http://schemas.microsoft.com/office/drawing/2014/main" id="{936FC195-276D-95E7-DA14-120C3ED4B474}"/>
+              </a:ext>
+            </a:extLst>
+          </p:cNvPr>
+          <p:cNvSpPr>
+            <a:spLocks noGrp="1"/>
+          </p:cNvSpPr>
+          <p:nvPr>
+            <p:ph type="dt" sz="half" idx="15"/>
+          </p:nvPr>
+        </p:nvSpPr>
+        <p:spPr/>
+        <p:txBody>
+          <a:bodyPr/>
+          <a:lstStyle/>
+          <a:p>
+            <a:fld id="{D0E1BD23-6D7F-4D20-950B-ACAE74369E0D}" type="datetime1">
+              <a:t>10/19/2026</a:t>
+            </a:fld>
+            <a:endParaRPr lang="en-US" dirty="0"/>
+          </a:p>
+        </p:txBody>
+      </p:sp>
+      <p:sp>
+        <p:nvSpPr>
+          <p:cNvPr id="6" name="页脚占位符 5">
+            <a:extLst>
+              <a:ext uri="{FF2B5EF4-FFF2-40B4-BE49-F238E27FC236}">
+                <a16:creationId xmlns:a16="http://schemas.microsoft.com/office/drawing/2014/main" id="{C3ACF131-BAD5-F22E-2A36-7DDCD58E1B95}"/>
+              </a:ext>
+            </a:extLst>
+          </p:cNvPr>
+          <p:cNvSpPr>
+            <a:spLocks noGrp="1"/>
+          </p:cNvSpPr>
+          <p:nvPr>
+            <p:ph type="ftr" sz="quarter" idx="16"/>
+          </p:nvPr>
+        </p:nvSpPr>
+        <p:spPr/>
+        <p:txBody>
+          <a:bodyPr/>
+          <a:lstStyle/>
+          <a:p>
+            <a:r>
+              <a:rPr lang="en-US" dirty="0"/>
+              <a:t>
+              </a:t>
+            </a:r>
+          </a:p>
+        </p:txBody>
+      </p:sp>
+      <p:sp>
+        <p:nvSpPr>
+          <p:cNvPr id="7" name="灯片编号占位符 6">
+            <a:extLst>
+              <a:ext uri="{FF2B5EF4-FFF2-40B4-BE49-F238E27FC236}">
+                <a16:creationId xmlns:a16="http://schemas.microsoft.com/office/drawing/2014/main" id="{9589A16C-0B31-CE3D-5D05-3B88B05023CE}"/>
+              </a:ext>
+            </a:extLst>
+          </p:cNvPr>
+          <p:cNvSpPr>
+            <a:spLocks noGrp="1"/>
+          </p:cNvSpPr>
+          <p:nvPr>
+            <p:ph type="sldNum" sz="quarter" idx="17"/>
+          </p:nvPr>
+        </p:nvSpPr>
+        <p:spPr/>
+        <p:txBody>
+          <a:bodyPr/>
+          <a:lstStyle/>
+          <a:p>
+            <a:fld id="{2DE90F28-AFBB-4AB2-AA79-6D3F72ED131B}" type="slidenum">
+              <a:rPr lang="en-US" dirty="0"/>
+              <a:pPr/>
+              <a:t>6</a:t>
+            </a:fld>
+            <a:endParaRPr lang="en-US" dirty="0"/>
+          </a:p>
+        </p:txBody>
+      </p:sp>
+    </p:spTree>
+    <p:extLst>
+      <p:ext uri="{BB962C8B-B14F-4D97-AF65-F5344CB8AC3E}">
+        <p14:creationId xmlns:p14="http://schemas.microsoft.com/office/powerpoint/2010/main" val="764453327"/>
       </p:ext>
     </p:extLst>
   </p:cSld>
